--- a/edge_ai/pptx/M1-05_Loop2_Data_Forwarder.pptx
+++ b/edge_ai/pptx/M1-05_Loop2_Data_Forwarder.pptx
@@ -22776,7 +22776,7 @@
                           </a:solidFill>
                           <a:latin typeface="Consolas"/>
                         </a:rPr>
-                        <a:t>opcional — só plano B</a:t>
+                        <a:t>não: o PC conecta por BLE</a:t>
                       </a:r>
                     </a:p>
                   </a:txBody>
@@ -27591,7 +27591,7 @@
                 </a:solidFill>
                 <a:latin typeface="Segoe UI"/>
               </a:rPr>
-              <a:t>Rode-o primeiro como está: a TAG anunciando, o Host plotando 9 canais. Só depois entra a única edição do curso — o fundo de escala.</a:t>
+              <a:t>Rode-o primeiro: a TAG anunciando, o Host plotando 9 canais. As duas divergências do repo, fundo de escala e LED, vêm nos próximos slides.</a:t>
             </a:r>
           </a:p>
         </p:txBody>
@@ -28426,7 +28426,7 @@
                 </a:solidFill>
                 <a:latin typeface="Segoe UI"/>
               </a:rPr>
-              <a:t>A única edição no sample: o fundo de escala</a:t>
+              <a:t>Primeira divergência: o fundo de escala</a:t>
             </a:r>
           </a:p>
         </p:txBody>
@@ -28644,7 +28644,7 @@
                 </a:solidFill>
                 <a:latin typeface="Consolas"/>
               </a:rPr>
-              <a:t>/* 05_data_forwarder/src/sensor/bmi270.c */</a:t>
+              <a:t>/* 05_data_forwarder/src/sensor/bmi270.c — sample: 2 g / 500 dps */</a:t>
             </a:r>
           </a:p>
           <a:p>
@@ -28660,7 +28660,7 @@
                 </a:solidFill>
                 <a:latin typeface="Consolas"/>
               </a:rPr>
-              <a:t>full_scale.val1 = 2;    </a:t>
+              <a:t>full_scale.val1 = 4;      </a:t>
             </a:r>
             <a:r>
               <a:rPr sz="1400" b="0">
@@ -28669,7 +28669,7 @@
                 </a:solidFill>
                 <a:latin typeface="Consolas"/>
               </a:rPr>
-              <a:t>/* G */</a:t>
+              <a:t>/* G   */</a:t>
             </a:r>
             <a:r>
               <a:rPr sz="1400" b="0">
@@ -28678,7 +28678,7 @@
                 </a:solidFill>
                 <a:latin typeface="Consolas"/>
               </a:rPr>
-              <a:t>      →   full_scale.val1 = 4;      </a:t>
+              <a:t>   </a:t>
             </a:r>
             <a:r>
               <a:rPr sz="1400" b="0">
@@ -28687,7 +28687,7 @@
                 </a:solidFill>
                 <a:latin typeface="Consolas"/>
               </a:rPr>
-              <a:t>/* linha 85  */</a:t>
+              <a:t>/* DIVERGENCIA DO CURSO */</a:t>
             </a:r>
           </a:p>
           <a:p>
@@ -28703,7 +28703,7 @@
                 </a:solidFill>
                 <a:latin typeface="Consolas"/>
               </a:rPr>
-              <a:t>full_scale.val1 = 500;  </a:t>
+              <a:t>full_scale.val1 = 1000;   </a:t>
             </a:r>
             <a:r>
               <a:rPr sz="1400" b="0">
@@ -28721,7 +28721,7 @@
                 </a:solidFill>
                 <a:latin typeface="Consolas"/>
               </a:rPr>
-              <a:t>    →   full_scale.val1 = 1000;   </a:t>
+              <a:t>   </a:t>
             </a:r>
             <a:r>
               <a:rPr sz="1400" b="0">
@@ -28730,7 +28730,7 @@
                 </a:solidFill>
                 <a:latin typeface="Consolas"/>
               </a:rPr>
-              <a:t>/* linha 102 */</a:t>
+              <a:t>/* DIVERGENCIA DO CURSO */</a:t>
             </a:r>
           </a:p>
         </p:txBody>
@@ -28769,7 +28769,7 @@
                 </a:solidFill>
                 <a:latin typeface="Segoe UI"/>
               </a:rPr>
-              <a:t>Depois: west build -p · west flash. A TAG anuncia como nRF DataFwd, 9 canais a 100 Hz.</a:t>
+              <a:t>west build -p · west flash. A TAG anuncia como nRF DataFwd, 9 canais a 100 Hz.</a:t>
             </a:r>
           </a:p>
         </p:txBody>
@@ -28817,25 +28817,7 @@
                 </a:solidFill>
                 <a:latin typeface="Segoe UI"/>
               </a:rPr>
-              <a:t>Dois literais, sem Kconfig — o repo fica como o sample e </a:t>
-            </a:r>
-            <a:r>
-              <a:rPr sz="1400" b="1">
-                <a:solidFill>
-                  <a:srgbClr val="0093D0"/>
-                </a:solidFill>
-                <a:latin typeface="Segoe UI"/>
-              </a:rPr>
-              <a:t>o aluno edita</a:t>
-            </a:r>
-            <a:r>
-              <a:rPr sz="1400" b="0">
-                <a:solidFill>
-                  <a:srgbClr val="0B1B2B"/>
-                </a:solidFill>
-                <a:latin typeface="Segoe UI"/>
-              </a:rPr>
-              <a:t>. É leitura de código, e é o que a app de inferência tem de repetir em </a:t>
+              <a:t>Dois literais, sem Kconfig — já trocados no repo, marcados no fonte. É o que a app de inferência repete em </a:t>
             </a:r>
             <a:r>
               <a:rPr sz="1400" b="0">
@@ -29443,7 +29425,7 @@
                 </a:solidFill>
                 <a:latin typeface="Segoe UI"/>
               </a:rPr>
-              <a:t>Única divergência de código do curso no 05 (marcada no cabeçalho do </a:t>
+              <a:t>Segunda divergência do curso no 05 (marcada no cabeçalho do </a:t>
             </a:r>
             <a:r>
               <a:rPr sz="1400" b="0">
@@ -30380,52 +30362,7 @@
                 </a:solidFill>
                 <a:latin typeface="Segoe UI"/>
               </a:rPr>
-              <a:t>Plano B para quem não conectar: a nRF54LM20-DK como ponte binária (</a:t>
-            </a:r>
-            <a:r>
-              <a:rPr sz="1400" b="0">
-                <a:solidFill>
-                  <a:srgbClr val="0B1B2B"/>
-                </a:solidFill>
-                <a:latin typeface="Consolas"/>
-              </a:rPr>
-              <a:t>03_central_uart</a:t>
-            </a:r>
-            <a:r>
-              <a:rPr sz="1400" b="0">
-                <a:solidFill>
-                  <a:srgbClr val="0B1B2B"/>
-                </a:solidFill>
-                <a:latin typeface="Segoe UI"/>
-              </a:rPr>
-              <a:t> + </a:t>
-            </a:r>
-            <a:r>
-              <a:rPr sz="1400" b="0">
-                <a:solidFill>
-                  <a:srgbClr val="0B1B2B"/>
-                </a:solidFill>
-                <a:latin typeface="Consolas"/>
-              </a:rPr>
-              <a:t>binary_bridge.conf</a:t>
-            </a:r>
-            <a:r>
-              <a:rPr sz="1400" b="0">
-                <a:solidFill>
-                  <a:srgbClr val="0B1B2B"/>
-                </a:solidFill>
-                <a:latin typeface="Segoe UI"/>
-              </a:rPr>
-              <a:t>) e o Host em modo </a:t>
-            </a:r>
-            <a:r>
-              <a:rPr sz="1400" b="1">
-                <a:solidFill>
-                  <a:srgbClr val="0093D0"/>
-                </a:solidFill>
-                <a:latin typeface="Segoe UI"/>
-              </a:rPr>
-              <a:t>UART</a:t>
+              <a:t>Sem Bluetooth no notebook: um adaptador USB BLE. A DK não entra no loop 2 — ela só grava a TAG</a:t>
             </a:r>
           </a:p>
         </p:txBody>
@@ -31051,25 +30988,7 @@
                           </a:solidFill>
                           <a:latin typeface="Segoe UI"/>
                         </a:rPr>
-                        <a:t>BLE NUS direto; </a:t>
-                      </a:r>
-                      <a:r>
-                        <a:rPr sz="1250" b="0">
-                          <a:solidFill>
-                            <a:srgbClr val="0B1B2B"/>
-                          </a:solidFill>
-                          <a:latin typeface="Consolas"/>
-                        </a:rPr>
-                        <a:t>uart</a:t>
-                      </a:r>
-                      <a:r>
-                        <a:rPr sz="1250" b="0">
-                          <a:solidFill>
-                            <a:srgbClr val="0B1B2B"/>
-                          </a:solidFill>
-                          <a:latin typeface="Segoe UI"/>
-                        </a:rPr>
-                        <a:t> só no plano B</a:t>
+                        <a:t>BLE NUS direto — a TAG não tem UART</a:t>
                       </a:r>
                     </a:p>
                   </a:txBody>
